--- a/public/fun/cards/life/life-20.pptx
+++ b/public/fun/cards/life/life-20.pptx
@@ -3085,7 +3085,7 @@
     <p:bg>
       <p:bgPr>
         <a:solidFill>
-          <a:srgbClr val="FBF8F2"/>
+          <a:srgbClr val="EFFBEF"/>
         </a:solidFill>
         <a:effectLst/>
       </p:bgPr>
@@ -3099,22 +3099,20 @@
       <p:grpSpPr/>
       <p:sp>
         <p:nvSpPr>
-          <p:cNvPr id="2" name="Oval 1"/>
+          <p:cNvPr id="2" name="Rectangle 1"/>
           <p:cNvSpPr/>
           <p:nvPr/>
         </p:nvSpPr>
         <p:spPr>
           <a:xfrm>
-            <a:off x="2462400" y="158400"/>
-            <a:ext cx="43200" cy="43200"/>
-          </a:xfrm>
-          <a:prstGeom prst="ellipse">
+            <a:off x="252000" y="144000"/>
+            <a:ext cx="201600" cy="21600"/>
+          </a:xfrm>
+          <a:prstGeom prst="rect">
             <a:avLst/>
           </a:prstGeom>
           <a:solidFill>
-            <a:srgbClr val="3B9191">
-              <a:alpha val="70000"/>
-            </a:srgbClr>
+            <a:srgbClr val="5CD65C"/>
           </a:solidFill>
           <a:ln>
             <a:noFill/>
@@ -3130,661 +3128,195 @@
       </p:sp>
       <p:sp>
         <p:nvSpPr>
-          <p:cNvPr id="3" name="Oval 2"/>
-          <p:cNvSpPr/>
+          <p:cNvPr id="3" name="텍스트"/>
+          <p:cNvSpPr txBox="1"/>
           <p:nvPr/>
         </p:nvSpPr>
         <p:spPr>
           <a:xfrm>
-            <a:off x="2462400" y="266400"/>
-            <a:ext cx="43200" cy="43200"/>
-          </a:xfrm>
-          <a:prstGeom prst="ellipse">
-            <a:avLst/>
-          </a:prstGeom>
-          <a:solidFill>
-            <a:srgbClr val="3B9191">
-              <a:alpha val="57999"/>
-            </a:srgbClr>
-          </a:solidFill>
-          <a:ln>
-            <a:noFill/>
-          </a:ln>
-        </p:spPr>
-        <p:txBody>
-          <a:bodyPr rtlCol="0" anchor="ctr"/>
-          <a:lstStyle/>
-          <a:p>
-            <a:pPr algn="ctr"/>
-          </a:p>
-        </p:txBody>
-      </p:sp>
-      <p:sp>
-        <p:nvSpPr>
-          <p:cNvPr id="4" name="Oval 3"/>
-          <p:cNvSpPr/>
-          <p:nvPr/>
-        </p:nvSpPr>
-        <p:spPr>
-          <a:xfrm>
-            <a:off x="2462400" y="374400"/>
-            <a:ext cx="43200" cy="43200"/>
-          </a:xfrm>
-          <a:prstGeom prst="ellipse">
-            <a:avLst/>
-          </a:prstGeom>
-          <a:solidFill>
-            <a:srgbClr val="3B9191">
-              <a:alpha val="46000"/>
-            </a:srgbClr>
-          </a:solidFill>
-          <a:ln>
-            <a:noFill/>
-          </a:ln>
-        </p:spPr>
-        <p:txBody>
-          <a:bodyPr rtlCol="0" anchor="ctr"/>
-          <a:lstStyle/>
-          <a:p>
-            <a:pPr algn="ctr"/>
-          </a:p>
-        </p:txBody>
-      </p:sp>
-      <p:sp>
-        <p:nvSpPr>
-          <p:cNvPr id="5" name="Oval 4"/>
-          <p:cNvSpPr/>
-          <p:nvPr/>
-        </p:nvSpPr>
-        <p:spPr>
-          <a:xfrm>
-            <a:off x="2462400" y="482400"/>
-            <a:ext cx="43200" cy="43200"/>
-          </a:xfrm>
-          <a:prstGeom prst="ellipse">
-            <a:avLst/>
-          </a:prstGeom>
-          <a:solidFill>
-            <a:srgbClr val="3B9191">
-              <a:alpha val="34000"/>
-            </a:srgbClr>
-          </a:solidFill>
-          <a:ln>
-            <a:noFill/>
-          </a:ln>
-        </p:spPr>
-        <p:txBody>
-          <a:bodyPr rtlCol="0" anchor="ctr"/>
-          <a:lstStyle/>
-          <a:p>
-            <a:pPr algn="ctr"/>
-          </a:p>
-        </p:txBody>
-      </p:sp>
-      <p:sp>
-        <p:nvSpPr>
-          <p:cNvPr id="6" name="Oval 5"/>
-          <p:cNvSpPr/>
-          <p:nvPr/>
-        </p:nvSpPr>
-        <p:spPr>
-          <a:xfrm>
-            <a:off x="2570400" y="158400"/>
-            <a:ext cx="43200" cy="43200"/>
-          </a:xfrm>
-          <a:prstGeom prst="ellipse">
-            <a:avLst/>
-          </a:prstGeom>
-          <a:solidFill>
-            <a:srgbClr val="3B9191">
-              <a:alpha val="70000"/>
-            </a:srgbClr>
-          </a:solidFill>
-          <a:ln>
-            <a:noFill/>
-          </a:ln>
-        </p:spPr>
-        <p:txBody>
-          <a:bodyPr rtlCol="0" anchor="ctr"/>
-          <a:lstStyle/>
-          <a:p>
-            <a:pPr algn="ctr"/>
-          </a:p>
-        </p:txBody>
-      </p:sp>
-      <p:sp>
-        <p:nvSpPr>
-          <p:cNvPr id="7" name="Oval 6"/>
-          <p:cNvSpPr/>
-          <p:nvPr/>
-        </p:nvSpPr>
-        <p:spPr>
-          <a:xfrm>
-            <a:off x="2570400" y="266400"/>
-            <a:ext cx="43200" cy="43200"/>
-          </a:xfrm>
-          <a:prstGeom prst="ellipse">
-            <a:avLst/>
-          </a:prstGeom>
-          <a:solidFill>
-            <a:srgbClr val="3B9191">
-              <a:alpha val="57999"/>
-            </a:srgbClr>
-          </a:solidFill>
-          <a:ln>
-            <a:noFill/>
-          </a:ln>
-        </p:spPr>
-        <p:txBody>
-          <a:bodyPr rtlCol="0" anchor="ctr"/>
-          <a:lstStyle/>
-          <a:p>
-            <a:pPr algn="ctr"/>
-          </a:p>
-        </p:txBody>
-      </p:sp>
-      <p:sp>
-        <p:nvSpPr>
-          <p:cNvPr id="8" name="Oval 7"/>
-          <p:cNvSpPr/>
-          <p:nvPr/>
-        </p:nvSpPr>
-        <p:spPr>
-          <a:xfrm>
-            <a:off x="2570400" y="374400"/>
-            <a:ext cx="43200" cy="43200"/>
-          </a:xfrm>
-          <a:prstGeom prst="ellipse">
-            <a:avLst/>
-          </a:prstGeom>
-          <a:solidFill>
-            <a:srgbClr val="3B9191">
-              <a:alpha val="46000"/>
-            </a:srgbClr>
-          </a:solidFill>
-          <a:ln>
-            <a:noFill/>
-          </a:ln>
-        </p:spPr>
-        <p:txBody>
-          <a:bodyPr rtlCol="0" anchor="ctr"/>
-          <a:lstStyle/>
-          <a:p>
-            <a:pPr algn="ctr"/>
-          </a:p>
-        </p:txBody>
-      </p:sp>
-      <p:sp>
-        <p:nvSpPr>
-          <p:cNvPr id="9" name="Oval 8"/>
-          <p:cNvSpPr/>
-          <p:nvPr/>
-        </p:nvSpPr>
-        <p:spPr>
-          <a:xfrm>
-            <a:off x="2570400" y="482400"/>
-            <a:ext cx="43200" cy="43200"/>
-          </a:xfrm>
-          <a:prstGeom prst="ellipse">
-            <a:avLst/>
-          </a:prstGeom>
-          <a:solidFill>
-            <a:srgbClr val="3B9191">
-              <a:alpha val="34000"/>
-            </a:srgbClr>
-          </a:solidFill>
-          <a:ln>
-            <a:noFill/>
-          </a:ln>
-        </p:spPr>
-        <p:txBody>
-          <a:bodyPr rtlCol="0" anchor="ctr"/>
-          <a:lstStyle/>
-          <a:p>
-            <a:pPr algn="ctr"/>
-          </a:p>
-        </p:txBody>
-      </p:sp>
-      <p:sp>
-        <p:nvSpPr>
-          <p:cNvPr id="10" name="Oval 9"/>
-          <p:cNvSpPr/>
-          <p:nvPr/>
-        </p:nvSpPr>
-        <p:spPr>
-          <a:xfrm>
-            <a:off x="2678400" y="158400"/>
-            <a:ext cx="43200" cy="43200"/>
-          </a:xfrm>
-          <a:prstGeom prst="ellipse">
-            <a:avLst/>
-          </a:prstGeom>
-          <a:solidFill>
-            <a:srgbClr val="3B9191">
-              <a:alpha val="70000"/>
-            </a:srgbClr>
-          </a:solidFill>
-          <a:ln>
-            <a:noFill/>
-          </a:ln>
-        </p:spPr>
-        <p:txBody>
-          <a:bodyPr rtlCol="0" anchor="ctr"/>
-          <a:lstStyle/>
-          <a:p>
-            <a:pPr algn="ctr"/>
-          </a:p>
-        </p:txBody>
-      </p:sp>
-      <p:sp>
-        <p:nvSpPr>
-          <p:cNvPr id="11" name="Oval 10"/>
-          <p:cNvSpPr/>
-          <p:nvPr/>
-        </p:nvSpPr>
-        <p:spPr>
-          <a:xfrm>
-            <a:off x="2678400" y="266400"/>
-            <a:ext cx="43200" cy="43200"/>
-          </a:xfrm>
-          <a:prstGeom prst="ellipse">
-            <a:avLst/>
-          </a:prstGeom>
-          <a:solidFill>
-            <a:srgbClr val="3B9191">
-              <a:alpha val="57999"/>
-            </a:srgbClr>
-          </a:solidFill>
-          <a:ln>
-            <a:noFill/>
-          </a:ln>
-        </p:spPr>
-        <p:txBody>
-          <a:bodyPr rtlCol="0" anchor="ctr"/>
-          <a:lstStyle/>
-          <a:p>
-            <a:pPr algn="ctr"/>
-          </a:p>
-        </p:txBody>
-      </p:sp>
-      <p:sp>
-        <p:nvSpPr>
-          <p:cNvPr id="12" name="Oval 11"/>
-          <p:cNvSpPr/>
-          <p:nvPr/>
-        </p:nvSpPr>
-        <p:spPr>
-          <a:xfrm>
-            <a:off x="2678400" y="374400"/>
-            <a:ext cx="43200" cy="43200"/>
-          </a:xfrm>
-          <a:prstGeom prst="ellipse">
-            <a:avLst/>
-          </a:prstGeom>
-          <a:solidFill>
-            <a:srgbClr val="3B9191">
-              <a:alpha val="46000"/>
-            </a:srgbClr>
-          </a:solidFill>
-          <a:ln>
-            <a:noFill/>
-          </a:ln>
-        </p:spPr>
-        <p:txBody>
-          <a:bodyPr rtlCol="0" anchor="ctr"/>
-          <a:lstStyle/>
-          <a:p>
-            <a:pPr algn="ctr"/>
-          </a:p>
-        </p:txBody>
-      </p:sp>
-      <p:sp>
-        <p:nvSpPr>
-          <p:cNvPr id="13" name="Oval 12"/>
-          <p:cNvSpPr/>
-          <p:nvPr/>
-        </p:nvSpPr>
-        <p:spPr>
-          <a:xfrm>
-            <a:off x="2678400" y="482400"/>
-            <a:ext cx="43200" cy="43200"/>
-          </a:xfrm>
-          <a:prstGeom prst="ellipse">
-            <a:avLst/>
-          </a:prstGeom>
-          <a:solidFill>
-            <a:srgbClr val="3B9191">
-              <a:alpha val="34000"/>
-            </a:srgbClr>
-          </a:solidFill>
-          <a:ln>
-            <a:noFill/>
-          </a:ln>
-        </p:spPr>
-        <p:txBody>
-          <a:bodyPr rtlCol="0" anchor="ctr"/>
-          <a:lstStyle/>
-          <a:p>
-            <a:pPr algn="ctr"/>
-          </a:p>
-        </p:txBody>
-      </p:sp>
-      <p:sp>
-        <p:nvSpPr>
-          <p:cNvPr id="14" name="Oval 13"/>
-          <p:cNvSpPr/>
-          <p:nvPr/>
-        </p:nvSpPr>
-        <p:spPr>
-          <a:xfrm>
-            <a:off x="2786400" y="158400"/>
-            <a:ext cx="43200" cy="43200"/>
-          </a:xfrm>
-          <a:prstGeom prst="ellipse">
-            <a:avLst/>
-          </a:prstGeom>
-          <a:solidFill>
-            <a:srgbClr val="3B9191">
-              <a:alpha val="70000"/>
-            </a:srgbClr>
-          </a:solidFill>
-          <a:ln>
-            <a:noFill/>
-          </a:ln>
-        </p:spPr>
-        <p:txBody>
-          <a:bodyPr rtlCol="0" anchor="ctr"/>
-          <a:lstStyle/>
-          <a:p>
-            <a:pPr algn="ctr"/>
-          </a:p>
-        </p:txBody>
-      </p:sp>
-      <p:sp>
-        <p:nvSpPr>
-          <p:cNvPr id="15" name="Oval 14"/>
-          <p:cNvSpPr/>
-          <p:nvPr/>
-        </p:nvSpPr>
-        <p:spPr>
-          <a:xfrm>
-            <a:off x="2786400" y="266400"/>
-            <a:ext cx="43200" cy="43200"/>
-          </a:xfrm>
-          <a:prstGeom prst="ellipse">
-            <a:avLst/>
-          </a:prstGeom>
-          <a:solidFill>
-            <a:srgbClr val="3B9191">
-              <a:alpha val="57999"/>
-            </a:srgbClr>
-          </a:solidFill>
-          <a:ln>
-            <a:noFill/>
-          </a:ln>
-        </p:spPr>
-        <p:txBody>
-          <a:bodyPr rtlCol="0" anchor="ctr"/>
-          <a:lstStyle/>
-          <a:p>
-            <a:pPr algn="ctr"/>
-          </a:p>
-        </p:txBody>
-      </p:sp>
-      <p:sp>
-        <p:nvSpPr>
-          <p:cNvPr id="16" name="Oval 15"/>
-          <p:cNvSpPr/>
-          <p:nvPr/>
-        </p:nvSpPr>
-        <p:spPr>
-          <a:xfrm>
-            <a:off x="2786400" y="374400"/>
-            <a:ext cx="43200" cy="43200"/>
-          </a:xfrm>
-          <a:prstGeom prst="ellipse">
-            <a:avLst/>
-          </a:prstGeom>
-          <a:solidFill>
-            <a:srgbClr val="3B9191">
-              <a:alpha val="46000"/>
-            </a:srgbClr>
-          </a:solidFill>
-          <a:ln>
-            <a:noFill/>
-          </a:ln>
-        </p:spPr>
-        <p:txBody>
-          <a:bodyPr rtlCol="0" anchor="ctr"/>
-          <a:lstStyle/>
-          <a:p>
-            <a:pPr algn="ctr"/>
-          </a:p>
-        </p:txBody>
-      </p:sp>
-      <p:sp>
-        <p:nvSpPr>
-          <p:cNvPr id="17" name="Oval 16"/>
-          <p:cNvSpPr/>
-          <p:nvPr/>
-        </p:nvSpPr>
-        <p:spPr>
-          <a:xfrm>
-            <a:off x="2786400" y="482400"/>
-            <a:ext cx="43200" cy="43200"/>
-          </a:xfrm>
-          <a:prstGeom prst="ellipse">
-            <a:avLst/>
-          </a:prstGeom>
-          <a:solidFill>
-            <a:srgbClr val="3B9191">
-              <a:alpha val="34000"/>
-            </a:srgbClr>
-          </a:solidFill>
-          <a:ln>
-            <a:noFill/>
-          </a:ln>
-        </p:spPr>
-        <p:txBody>
-          <a:bodyPr rtlCol="0" anchor="ctr"/>
-          <a:lstStyle/>
-          <a:p>
-            <a:pPr algn="ctr"/>
-          </a:p>
-        </p:txBody>
-      </p:sp>
-      <p:sp>
-        <p:nvSpPr>
-          <p:cNvPr id="18" name="Oval 17"/>
-          <p:cNvSpPr/>
-          <p:nvPr/>
-        </p:nvSpPr>
-        <p:spPr>
-          <a:xfrm>
-            <a:off x="2894400" y="158400"/>
-            <a:ext cx="43200" cy="43200"/>
-          </a:xfrm>
-          <a:prstGeom prst="ellipse">
-            <a:avLst/>
-          </a:prstGeom>
-          <a:solidFill>
-            <a:srgbClr val="3B9191">
-              <a:alpha val="70000"/>
-            </a:srgbClr>
-          </a:solidFill>
-          <a:ln>
-            <a:noFill/>
-          </a:ln>
-        </p:spPr>
-        <p:txBody>
-          <a:bodyPr rtlCol="0" anchor="ctr"/>
-          <a:lstStyle/>
-          <a:p>
-            <a:pPr algn="ctr"/>
-          </a:p>
-        </p:txBody>
-      </p:sp>
-      <p:sp>
-        <p:nvSpPr>
-          <p:cNvPr id="19" name="Oval 18"/>
-          <p:cNvSpPr/>
-          <p:nvPr/>
-        </p:nvSpPr>
-        <p:spPr>
-          <a:xfrm>
-            <a:off x="2894400" y="266400"/>
-            <a:ext cx="43200" cy="43200"/>
-          </a:xfrm>
-          <a:prstGeom prst="ellipse">
-            <a:avLst/>
-          </a:prstGeom>
-          <a:solidFill>
-            <a:srgbClr val="3B9191">
-              <a:alpha val="57999"/>
-            </a:srgbClr>
-          </a:solidFill>
-          <a:ln>
-            <a:noFill/>
-          </a:ln>
-        </p:spPr>
-        <p:txBody>
-          <a:bodyPr rtlCol="0" anchor="ctr"/>
-          <a:lstStyle/>
-          <a:p>
-            <a:pPr algn="ctr"/>
-          </a:p>
-        </p:txBody>
-      </p:sp>
-      <p:sp>
-        <p:nvSpPr>
-          <p:cNvPr id="20" name="Oval 19"/>
-          <p:cNvSpPr/>
-          <p:nvPr/>
-        </p:nvSpPr>
-        <p:spPr>
-          <a:xfrm>
-            <a:off x="2894400" y="374400"/>
-            <a:ext cx="43200" cy="43200"/>
-          </a:xfrm>
-          <a:prstGeom prst="ellipse">
-            <a:avLst/>
-          </a:prstGeom>
-          <a:solidFill>
-            <a:srgbClr val="3B9191">
-              <a:alpha val="46000"/>
-            </a:srgbClr>
-          </a:solidFill>
-          <a:ln>
-            <a:noFill/>
-          </a:ln>
-        </p:spPr>
-        <p:txBody>
-          <a:bodyPr rtlCol="0" anchor="ctr"/>
-          <a:lstStyle/>
-          <a:p>
-            <a:pPr algn="ctr"/>
-          </a:p>
-        </p:txBody>
-      </p:sp>
-      <p:sp>
-        <p:nvSpPr>
-          <p:cNvPr id="21" name="Oval 20"/>
-          <p:cNvSpPr/>
-          <p:nvPr/>
-        </p:nvSpPr>
-        <p:spPr>
-          <a:xfrm>
-            <a:off x="2894400" y="482400"/>
-            <a:ext cx="43200" cy="43200"/>
-          </a:xfrm>
-          <a:prstGeom prst="ellipse">
-            <a:avLst/>
-          </a:prstGeom>
-          <a:solidFill>
-            <a:srgbClr val="3B9191">
-              <a:alpha val="34000"/>
-            </a:srgbClr>
-          </a:solidFill>
-          <a:ln>
-            <a:noFill/>
-          </a:ln>
-        </p:spPr>
-        <p:txBody>
-          <a:bodyPr rtlCol="0" anchor="ctr"/>
-          <a:lstStyle/>
-          <a:p>
-            <a:pPr algn="ctr"/>
-          </a:p>
-        </p:txBody>
-      </p:sp>
-      <p:sp>
-        <p:nvSpPr>
-          <p:cNvPr id="22" name="Rectangle 21"/>
-          <p:cNvSpPr/>
-          <p:nvPr/>
-        </p:nvSpPr>
-        <p:spPr>
-          <a:xfrm>
-            <a:off x="0" y="1663200"/>
-            <a:ext cx="3240000" cy="136800"/>
+            <a:off x="252000" y="273600"/>
+            <a:ext cx="2160000" cy="360000"/>
           </a:xfrm>
           <a:prstGeom prst="rect">
             <a:avLst/>
           </a:prstGeom>
-          <a:solidFill>
-            <a:srgbClr val="3B9191"/>
-          </a:solidFill>
-          <a:ln>
-            <a:noFill/>
-          </a:ln>
-        </p:spPr>
-        <p:txBody>
-          <a:bodyPr rtlCol="0" anchor="ctr"/>
-          <a:lstStyle/>
-          <a:p>
-            <a:pPr algn="ctr"/>
-          </a:p>
-        </p:txBody>
-      </p:sp>
-      <p:sp>
-        <p:nvSpPr>
-          <p:cNvPr id="23" name="Rectangle 22"/>
-          <p:cNvSpPr/>
+          <a:noFill/>
+        </p:spPr>
+        <p:txBody>
+          <a:bodyPr wrap="square" lIns="0" rIns="0" tIns="0" bIns="0" anchor="t">
+            <a:spAutoFit/>
+          </a:bodyPr>
+          <a:lstStyle/>
+          <a:p>
+            <a:pPr algn="l">
+              <a:lnSpc>
+                <a:spcPts val="3190"/>
+              </a:lnSpc>
+            </a:pPr>
+            <a:r>
+              <a:rPr sz="2200" b="1">
+                <a:solidFill>
+                  <a:srgbClr val="12151C"/>
+                </a:solidFill>
+                <a:latin typeface="맑은 고딕"/>
+                <a:ea typeface="맑은 고딕"/>
+              </a:rPr>
+              <a:t>홍석진</a:t>
+            </a:r>
+          </a:p>
+        </p:txBody>
+      </p:sp>
+      <p:sp>
+        <p:nvSpPr>
+          <p:cNvPr id="4" name="텍스트"/>
+          <p:cNvSpPr txBox="1"/>
           <p:nvPr/>
         </p:nvSpPr>
         <p:spPr>
           <a:xfrm>
-            <a:off x="0" y="1663200"/>
-            <a:ext cx="936000" cy="136800"/>
+            <a:off x="252000" y="676800"/>
+            <a:ext cx="2160000" cy="171451"/>
           </a:xfrm>
           <a:prstGeom prst="rect">
             <a:avLst/>
           </a:prstGeom>
-          <a:solidFill>
-            <a:srgbClr val="C8E0E0"/>
-          </a:solidFill>
-          <a:ln>
-            <a:noFill/>
-          </a:ln>
-        </p:spPr>
-        <p:txBody>
-          <a:bodyPr rtlCol="0" anchor="ctr"/>
-          <a:lstStyle/>
-          <a:p>
-            <a:pPr algn="ctr"/>
-          </a:p>
-        </p:txBody>
-      </p:sp>
-      <p:sp>
-        <p:nvSpPr>
-          <p:cNvPr id="24" name="텍스트"/>
+          <a:noFill/>
+        </p:spPr>
+        <p:txBody>
+          <a:bodyPr wrap="square" lIns="0" rIns="0" tIns="0" bIns="0" anchor="t">
+            <a:spAutoFit/>
+          </a:bodyPr>
+          <a:lstStyle/>
+          <a:p>
+            <a:pPr algn="l">
+              <a:lnSpc>
+                <a:spcPts val="1305"/>
+              </a:lnSpc>
+            </a:pPr>
+            <a:r>
+              <a:rPr sz="900" b="0">
+                <a:solidFill>
+                  <a:srgbClr val="2E5E34"/>
+                </a:solidFill>
+                <a:latin typeface="맑은 고딕"/>
+                <a:ea typeface="맑은 고딕"/>
+              </a:rPr>
+              <a:t>가구 공방 대표</a:t>
+            </a:r>
+          </a:p>
+        </p:txBody>
+      </p:sp>
+      <p:sp>
+        <p:nvSpPr>
+          <p:cNvPr id="5" name="텍스트"/>
           <p:cNvSpPr txBox="1"/>
           <p:nvPr/>
         </p:nvSpPr>
         <p:spPr>
           <a:xfrm>
-            <a:off x="252000" y="208800"/>
-            <a:ext cx="1800000" cy="100800"/>
+            <a:off x="1548000" y="230400"/>
+            <a:ext cx="1440000" cy="123826"/>
+          </a:xfrm>
+          <a:prstGeom prst="rect">
+            <a:avLst/>
+          </a:prstGeom>
+          <a:noFill/>
+        </p:spPr>
+        <p:txBody>
+          <a:bodyPr wrap="square" lIns="0" rIns="0" tIns="0" bIns="0" anchor="t">
+            <a:spAutoFit/>
+          </a:bodyPr>
+          <a:lstStyle/>
+          <a:p>
+            <a:pPr algn="r">
+              <a:lnSpc>
+                <a:spcPts val="942"/>
+              </a:lnSpc>
+            </a:pPr>
+            <a:r>
+              <a:rPr sz="650" b="1" spc="200">
+                <a:solidFill>
+                  <a:srgbClr val="2E5E34"/>
+                </a:solidFill>
+                <a:latin typeface="맑은 고딕"/>
+                <a:ea typeface="맑은 고딕"/>
+              </a:rPr>
+              <a:t>상호명</a:t>
+            </a:r>
+          </a:p>
+        </p:txBody>
+      </p:sp>
+      <p:cxnSp>
+        <p:nvCxnSpPr>
+          <p:cNvPr id="6" name="Connector 5"/>
+          <p:cNvCxnSpPr/>
+          <p:nvPr/>
+        </p:nvCxnSpPr>
+        <p:spPr>
+          <a:xfrm>
+            <a:off x="252000" y="1051200"/>
+            <a:ext cx="2736000" cy="0"/>
+          </a:xfrm>
+          <a:prstGeom prst="line">
+            <a:avLst/>
+          </a:prstGeom>
+          <a:ln w="5760">
+            <a:solidFill>
+              <a:srgbClr val="D1F4D1"/>
+            </a:solidFill>
+          </a:ln>
+        </p:spPr>
+      </p:cxnSp>
+      <p:sp>
+        <p:nvSpPr>
+          <p:cNvPr id="7" name="텍스트"/>
+          <p:cNvSpPr txBox="1"/>
+          <p:nvPr/>
+        </p:nvSpPr>
+        <p:spPr>
+          <a:xfrm>
+            <a:off x="252000" y="1123200"/>
+            <a:ext cx="576000" cy="99061"/>
+          </a:xfrm>
+          <a:prstGeom prst="rect">
+            <a:avLst/>
+          </a:prstGeom>
+          <a:noFill/>
+        </p:spPr>
+        <p:txBody>
+          <a:bodyPr wrap="square" lIns="0" rIns="0" tIns="0" bIns="0" anchor="t">
+            <a:spAutoFit/>
+          </a:bodyPr>
+          <a:lstStyle/>
+          <a:p>
+            <a:pPr algn="l">
+              <a:lnSpc>
+                <a:spcPts val="754"/>
+              </a:lnSpc>
+            </a:pPr>
+            <a:r>
+              <a:rPr sz="520" b="1" spc="150">
+                <a:solidFill>
+                  <a:srgbClr val="2E5E34"/>
+                </a:solidFill>
+                <a:latin typeface="맑은 고딕"/>
+                <a:ea typeface="맑은 고딕"/>
+              </a:rPr>
+              <a:t>TEL</a:t>
+            </a:r>
+          </a:p>
+        </p:txBody>
+      </p:sp>
+      <p:sp>
+        <p:nvSpPr>
+          <p:cNvPr id="8" name="텍스트"/>
+          <p:cNvSpPr txBox="1"/>
+          <p:nvPr/>
+        </p:nvSpPr>
+        <p:spPr>
+          <a:xfrm>
+            <a:off x="900000" y="1101600"/>
+            <a:ext cx="2088000" cy="142876"/>
           </a:xfrm>
           <a:prstGeom prst="rect">
             <a:avLst/>
@@ -3803,169 +3335,9 @@
               </a:lnSpc>
             </a:pPr>
             <a:r>
-              <a:rPr sz="750" b="1" spc="150">
+              <a:rPr sz="750" b="0">
                 <a:solidFill>
-                  <a:srgbClr val="786B5F"/>
-                </a:solidFill>
-                <a:latin typeface="맑은 고딕"/>
-                <a:ea typeface="맑은 고딕"/>
-              </a:rPr>
-              <a:t>상호명</a:t>
-            </a:r>
-          </a:p>
-        </p:txBody>
-      </p:sp>
-      <p:sp>
-        <p:nvSpPr>
-          <p:cNvPr id="25" name="텍스트"/>
-          <p:cNvSpPr txBox="1"/>
-          <p:nvPr/>
-        </p:nvSpPr>
-        <p:spPr>
-          <a:xfrm>
-            <a:off x="252000" y="540000"/>
-            <a:ext cx="2016000" cy="313692"/>
-          </a:xfrm>
-          <a:prstGeom prst="rect">
-            <a:avLst/>
-          </a:prstGeom>
-          <a:noFill/>
-        </p:spPr>
-        <p:txBody>
-          <a:bodyPr wrap="square" lIns="0" rIns="0" tIns="0" bIns="0" anchor="t">
-            <a:spAutoFit/>
-          </a:bodyPr>
-          <a:lstStyle/>
-          <a:p>
-            <a:pPr algn="l">
-              <a:lnSpc>
-                <a:spcPts val="2755"/>
-              </a:lnSpc>
-            </a:pPr>
-            <a:r>
-              <a:rPr sz="1900" b="1" spc="50">
-                <a:solidFill>
-                  <a:srgbClr val="3A2918"/>
-                </a:solidFill>
-                <a:latin typeface="맑은 고딕"/>
-                <a:ea typeface="맑은 고딕"/>
-              </a:rPr>
-              <a:t>홍석진</a:t>
-            </a:r>
-          </a:p>
-        </p:txBody>
-      </p:sp>
-      <p:sp>
-        <p:nvSpPr>
-          <p:cNvPr id="26" name="텍스트"/>
-          <p:cNvSpPr txBox="1"/>
-          <p:nvPr/>
-        </p:nvSpPr>
-        <p:spPr>
-          <a:xfrm>
-            <a:off x="252000" y="828000"/>
-            <a:ext cx="2016000" cy="122400"/>
-          </a:xfrm>
-          <a:prstGeom prst="rect">
-            <a:avLst/>
-          </a:prstGeom>
-          <a:noFill/>
-        </p:spPr>
-        <p:txBody>
-          <a:bodyPr wrap="square" lIns="0" rIns="0" tIns="0" bIns="0" anchor="t">
-            <a:spAutoFit/>
-          </a:bodyPr>
-          <a:lstStyle/>
-          <a:p>
-            <a:pPr algn="l">
-              <a:lnSpc>
-                <a:spcPts val="1232"/>
-              </a:lnSpc>
-            </a:pPr>
-            <a:r>
-              <a:rPr sz="850" b="1">
-                <a:solidFill>
-                  <a:srgbClr val="327B7B"/>
-                </a:solidFill>
-                <a:latin typeface="맑은 고딕"/>
-                <a:ea typeface="맑은 고딕"/>
-              </a:rPr>
-              <a:t>가구 공방 대표</a:t>
-            </a:r>
-          </a:p>
-        </p:txBody>
-      </p:sp>
-      <p:sp>
-        <p:nvSpPr>
-          <p:cNvPr id="27" name="텍스트"/>
-          <p:cNvSpPr txBox="1"/>
-          <p:nvPr/>
-        </p:nvSpPr>
-        <p:spPr>
-          <a:xfrm>
-            <a:off x="252000" y="1108800"/>
-            <a:ext cx="122400" cy="168911"/>
-          </a:xfrm>
-          <a:prstGeom prst="rect">
-            <a:avLst/>
-          </a:prstGeom>
-          <a:noFill/>
-        </p:spPr>
-        <p:txBody>
-          <a:bodyPr wrap="square" lIns="0" rIns="0" tIns="0" bIns="0" anchor="t">
-            <a:spAutoFit/>
-          </a:bodyPr>
-          <a:lstStyle/>
-          <a:p>
-            <a:pPr algn="l">
-              <a:lnSpc>
-                <a:spcPts val="1015"/>
-              </a:lnSpc>
-            </a:pPr>
-            <a:r>
-              <a:rPr sz="700" b="1">
-                <a:solidFill>
-                  <a:srgbClr val="327B7B"/>
-                </a:solidFill>
-                <a:latin typeface="맑은 고딕"/>
-                <a:ea typeface="맑은 고딕"/>
-              </a:rPr>
-              <a:t>T</a:t>
-            </a:r>
-          </a:p>
-        </p:txBody>
-      </p:sp>
-      <p:sp>
-        <p:nvSpPr>
-          <p:cNvPr id="28" name="텍스트"/>
-          <p:cNvSpPr txBox="1"/>
-          <p:nvPr/>
-        </p:nvSpPr>
-        <p:spPr>
-          <a:xfrm>
-            <a:off x="396000" y="1108800"/>
-            <a:ext cx="1584000" cy="168911"/>
-          </a:xfrm>
-          <a:prstGeom prst="rect">
-            <a:avLst/>
-          </a:prstGeom>
-          <a:noFill/>
-        </p:spPr>
-        <p:txBody>
-          <a:bodyPr wrap="square" lIns="0" rIns="0" tIns="0" bIns="0" anchor="t">
-            <a:spAutoFit/>
-          </a:bodyPr>
-          <a:lstStyle/>
-          <a:p>
-            <a:pPr algn="l">
-              <a:lnSpc>
-                <a:spcPts val="1015"/>
-              </a:lnSpc>
-            </a:pPr>
-            <a:r>
-              <a:rPr sz="700" b="0">
-                <a:solidFill>
-                  <a:srgbClr val="3A2918"/>
+                  <a:srgbClr val="12151C"/>
                 </a:solidFill>
                 <a:latin typeface="맑은 고딕"/>
                 <a:ea typeface="맑은 고딕"/>
@@ -3975,16 +3347,37 @@
           </a:p>
         </p:txBody>
       </p:sp>
-      <p:sp>
-        <p:nvSpPr>
-          <p:cNvPr id="29" name="텍스트"/>
+      <p:cxnSp>
+        <p:nvCxnSpPr>
+          <p:cNvPr id="9" name="Connector 8"/>
+          <p:cNvCxnSpPr/>
+          <p:nvPr/>
+        </p:nvCxnSpPr>
+        <p:spPr>
+          <a:xfrm>
+            <a:off x="252000" y="1274400"/>
+            <a:ext cx="2736000" cy="0"/>
+          </a:xfrm>
+          <a:prstGeom prst="line">
+            <a:avLst/>
+          </a:prstGeom>
+          <a:ln w="5760">
+            <a:solidFill>
+              <a:srgbClr val="D1F4D1"/>
+            </a:solidFill>
+          </a:ln>
+        </p:spPr>
+      </p:cxnSp>
+      <p:sp>
+        <p:nvSpPr>
+          <p:cNvPr id="10" name="텍스트"/>
           <p:cNvSpPr txBox="1"/>
           <p:nvPr/>
         </p:nvSpPr>
         <p:spPr>
           <a:xfrm>
-            <a:off x="252000" y="1277711"/>
-            <a:ext cx="122400" cy="168911"/>
+            <a:off x="252000" y="1346400"/>
+            <a:ext cx="576000" cy="99061"/>
           </a:xfrm>
           <a:prstGeom prst="rect">
             <a:avLst/>
@@ -3999,32 +3392,32 @@
           <a:p>
             <a:pPr algn="l">
               <a:lnSpc>
-                <a:spcPts val="1015"/>
+                <a:spcPts val="754"/>
               </a:lnSpc>
             </a:pPr>
             <a:r>
-              <a:rPr sz="700" b="1">
+              <a:rPr sz="520" b="1" spc="150">
                 <a:solidFill>
-                  <a:srgbClr val="327B7B"/>
+                  <a:srgbClr val="2E5E34"/>
                 </a:solidFill>
                 <a:latin typeface="맑은 고딕"/>
                 <a:ea typeface="맑은 고딕"/>
               </a:rPr>
-              <a:t>E</a:t>
-            </a:r>
-          </a:p>
-        </p:txBody>
-      </p:sp>
-      <p:sp>
-        <p:nvSpPr>
-          <p:cNvPr id="30" name="텍스트"/>
+              <a:t>MAIL</a:t>
+            </a:r>
+          </a:p>
+        </p:txBody>
+      </p:sp>
+      <p:sp>
+        <p:nvSpPr>
+          <p:cNvPr id="11" name="텍스트"/>
           <p:cNvSpPr txBox="1"/>
           <p:nvPr/>
         </p:nvSpPr>
         <p:spPr>
           <a:xfrm>
-            <a:off x="396000" y="1277711"/>
-            <a:ext cx="1584000" cy="168911"/>
+            <a:off x="900000" y="1324800"/>
+            <a:ext cx="2088000" cy="142876"/>
           </a:xfrm>
           <a:prstGeom prst="rect">
             <a:avLst/>
@@ -4039,13 +3432,13 @@
           <a:p>
             <a:pPr algn="l">
               <a:lnSpc>
-                <a:spcPts val="1015"/>
+                <a:spcPts val="1087"/>
               </a:lnSpc>
             </a:pPr>
             <a:r>
-              <a:rPr sz="700" b="0">
+              <a:rPr sz="750" b="0">
                 <a:solidFill>
-                  <a:srgbClr val="3A2918"/>
+                  <a:srgbClr val="12151C"/>
                 </a:solidFill>
                 <a:latin typeface="맑은 고딕"/>
                 <a:ea typeface="맑은 고딕"/>
@@ -4055,16 +3448,37 @@
           </a:p>
         </p:txBody>
       </p:sp>
-      <p:sp>
-        <p:nvSpPr>
-          <p:cNvPr id="31" name="텍스트"/>
+      <p:cxnSp>
+        <p:nvCxnSpPr>
+          <p:cNvPr id="12" name="Connector 11"/>
+          <p:cNvCxnSpPr/>
+          <p:nvPr/>
+        </p:nvCxnSpPr>
+        <p:spPr>
+          <a:xfrm>
+            <a:off x="252000" y="1497600"/>
+            <a:ext cx="2736000" cy="0"/>
+          </a:xfrm>
+          <a:prstGeom prst="line">
+            <a:avLst/>
+          </a:prstGeom>
+          <a:ln w="5760">
+            <a:solidFill>
+              <a:srgbClr val="D1F4D1"/>
+            </a:solidFill>
+          </a:ln>
+        </p:spPr>
+      </p:cxnSp>
+      <p:sp>
+        <p:nvSpPr>
+          <p:cNvPr id="13" name="텍스트"/>
           <p:cNvSpPr txBox="1"/>
           <p:nvPr/>
         </p:nvSpPr>
         <p:spPr>
           <a:xfrm>
-            <a:off x="252000" y="1446622"/>
-            <a:ext cx="122400" cy="168911"/>
+            <a:off x="252000" y="1569600"/>
+            <a:ext cx="576000" cy="99061"/>
           </a:xfrm>
           <a:prstGeom prst="rect">
             <a:avLst/>
@@ -4079,32 +3493,32 @@
           <a:p>
             <a:pPr algn="l">
               <a:lnSpc>
-                <a:spcPts val="1015"/>
+                <a:spcPts val="754"/>
               </a:lnSpc>
             </a:pPr>
             <a:r>
-              <a:rPr sz="700" b="1">
+              <a:rPr sz="520" b="1" spc="150">
                 <a:solidFill>
-                  <a:srgbClr val="327B7B"/>
+                  <a:srgbClr val="2E5E34"/>
                 </a:solidFill>
                 <a:latin typeface="맑은 고딕"/>
                 <a:ea typeface="맑은 고딕"/>
               </a:rPr>
-              <a:t>A</a:t>
-            </a:r>
-          </a:p>
-        </p:txBody>
-      </p:sp>
-      <p:sp>
-        <p:nvSpPr>
-          <p:cNvPr id="32" name="텍스트"/>
+              <a:t>ADDR</a:t>
+            </a:r>
+          </a:p>
+        </p:txBody>
+      </p:sp>
+      <p:sp>
+        <p:nvSpPr>
+          <p:cNvPr id="14" name="텍스트"/>
           <p:cNvSpPr txBox="1"/>
           <p:nvPr/>
         </p:nvSpPr>
         <p:spPr>
           <a:xfrm>
-            <a:off x="396000" y="1446622"/>
-            <a:ext cx="1584000" cy="168911"/>
+            <a:off x="900000" y="1548000"/>
+            <a:ext cx="2088000" cy="142876"/>
           </a:xfrm>
           <a:prstGeom prst="rect">
             <a:avLst/>
@@ -4119,13 +3533,13 @@
           <a:p>
             <a:pPr algn="l">
               <a:lnSpc>
-                <a:spcPts val="1015"/>
+                <a:spcPts val="1087"/>
               </a:lnSpc>
             </a:pPr>
             <a:r>
-              <a:rPr sz="700" b="0">
+              <a:rPr sz="750" b="0">
                 <a:solidFill>
-                  <a:srgbClr val="3A2918"/>
+                  <a:srgbClr val="12151C"/>
                 </a:solidFill>
                 <a:latin typeface="맑은 고딕"/>
                 <a:ea typeface="맑은 고딕"/>
@@ -4135,180 +3549,27 @@
           </a:p>
         </p:txBody>
       </p:sp>
-      <p:sp>
-        <p:nvSpPr>
-          <p:cNvPr id="33" name="Oval 32"/>
-          <p:cNvSpPr/>
+      <p:cxnSp>
+        <p:nvCxnSpPr>
+          <p:cNvPr id="15" name="Connector 14"/>
+          <p:cNvCxnSpPr/>
           <p:nvPr/>
-        </p:nvSpPr>
-        <p:spPr>
-          <a:xfrm>
-            <a:off x="2842560" y="1055520"/>
-            <a:ext cx="74880" cy="126720"/>
-          </a:xfrm>
-          <a:prstGeom prst="ellipse">
+        </p:nvCxnSpPr>
+        <p:spPr>
+          <a:xfrm>
+            <a:off x="252000" y="1720800"/>
+            <a:ext cx="2736000" cy="0"/>
+          </a:xfrm>
+          <a:prstGeom prst="line">
             <a:avLst/>
           </a:prstGeom>
-          <a:solidFill>
-            <a:srgbClr val="3B9191"/>
-          </a:solidFill>
-          <a:ln>
-            <a:noFill/>
+          <a:ln w="5760">
+            <a:solidFill>
+              <a:srgbClr val="D1F4D1"/>
+            </a:solidFill>
           </a:ln>
         </p:spPr>
-        <p:txBody>
-          <a:bodyPr rtlCol="0" anchor="ctr"/>
-          <a:lstStyle/>
-          <a:p>
-            <a:pPr algn="ctr"/>
-          </a:p>
-        </p:txBody>
-      </p:sp>
-      <p:sp>
-        <p:nvSpPr>
-          <p:cNvPr id="34" name="Oval 33"/>
-          <p:cNvSpPr/>
-          <p:nvPr/>
-        </p:nvSpPr>
-        <p:spPr>
-          <a:xfrm rot="4320000">
-            <a:off x="2908297" y="1103281"/>
-            <a:ext cx="74880" cy="126720"/>
-          </a:xfrm>
-          <a:prstGeom prst="ellipse">
-            <a:avLst/>
-          </a:prstGeom>
-          <a:solidFill>
-            <a:srgbClr val="3B9191"/>
-          </a:solidFill>
-          <a:ln>
-            <a:noFill/>
-          </a:ln>
-        </p:spPr>
-        <p:txBody>
-          <a:bodyPr rtlCol="0" anchor="ctr"/>
-          <a:lstStyle/>
-          <a:p>
-            <a:pPr algn="ctr"/>
-          </a:p>
-        </p:txBody>
-      </p:sp>
-      <p:sp>
-        <p:nvSpPr>
-          <p:cNvPr id="35" name="Oval 34"/>
-          <p:cNvSpPr/>
-          <p:nvPr/>
-        </p:nvSpPr>
-        <p:spPr>
-          <a:xfrm rot="8640000">
-            <a:off x="2883188" y="1180559"/>
-            <a:ext cx="74880" cy="126720"/>
-          </a:xfrm>
-          <a:prstGeom prst="ellipse">
-            <a:avLst/>
-          </a:prstGeom>
-          <a:solidFill>
-            <a:srgbClr val="3B9191"/>
-          </a:solidFill>
-          <a:ln>
-            <a:noFill/>
-          </a:ln>
-        </p:spPr>
-        <p:txBody>
-          <a:bodyPr rtlCol="0" anchor="ctr"/>
-          <a:lstStyle/>
-          <a:p>
-            <a:pPr algn="ctr"/>
-          </a:p>
-        </p:txBody>
-      </p:sp>
-      <p:sp>
-        <p:nvSpPr>
-          <p:cNvPr id="36" name="Oval 35"/>
-          <p:cNvSpPr/>
-          <p:nvPr/>
-        </p:nvSpPr>
-        <p:spPr>
-          <a:xfrm rot="12960000">
-            <a:off x="2801932" y="1180559"/>
-            <a:ext cx="74880" cy="126720"/>
-          </a:xfrm>
-          <a:prstGeom prst="ellipse">
-            <a:avLst/>
-          </a:prstGeom>
-          <a:solidFill>
-            <a:srgbClr val="3B9191"/>
-          </a:solidFill>
-          <a:ln>
-            <a:noFill/>
-          </a:ln>
-        </p:spPr>
-        <p:txBody>
-          <a:bodyPr rtlCol="0" anchor="ctr"/>
-          <a:lstStyle/>
-          <a:p>
-            <a:pPr algn="ctr"/>
-          </a:p>
-        </p:txBody>
-      </p:sp>
-      <p:sp>
-        <p:nvSpPr>
-          <p:cNvPr id="37" name="Oval 36"/>
-          <p:cNvSpPr/>
-          <p:nvPr/>
-        </p:nvSpPr>
-        <p:spPr>
-          <a:xfrm rot="17280000">
-            <a:off x="2776823" y="1103281"/>
-            <a:ext cx="74880" cy="126720"/>
-          </a:xfrm>
-          <a:prstGeom prst="ellipse">
-            <a:avLst/>
-          </a:prstGeom>
-          <a:solidFill>
-            <a:srgbClr val="3B9191"/>
-          </a:solidFill>
-          <a:ln>
-            <a:noFill/>
-          </a:ln>
-        </p:spPr>
-        <p:txBody>
-          <a:bodyPr rtlCol="0" anchor="ctr"/>
-          <a:lstStyle/>
-          <a:p>
-            <a:pPr algn="ctr"/>
-          </a:p>
-        </p:txBody>
-      </p:sp>
-      <p:sp>
-        <p:nvSpPr>
-          <p:cNvPr id="38" name="Oval 37"/>
-          <p:cNvSpPr/>
-          <p:nvPr/>
-        </p:nvSpPr>
-        <p:spPr>
-          <a:xfrm>
-            <a:off x="2848320" y="1156320"/>
-            <a:ext cx="63360" cy="63360"/>
-          </a:xfrm>
-          <a:prstGeom prst="ellipse">
-            <a:avLst/>
-          </a:prstGeom>
-          <a:solidFill>
-            <a:srgbClr val="C8E0E0"/>
-          </a:solidFill>
-          <a:ln>
-            <a:noFill/>
-          </a:ln>
-        </p:spPr>
-        <p:txBody>
-          <a:bodyPr rtlCol="0" anchor="ctr"/>
-          <a:lstStyle/>
-          <a:p>
-            <a:pPr algn="ctr"/>
-          </a:p>
-        </p:txBody>
-      </p:sp>
+      </p:cxnSp>
     </p:spTree>
   </p:cSld>
   <p:clrMapOvr>
@@ -4323,7 +3584,7 @@
     <p:bg>
       <p:bgPr>
         <a:solidFill>
-          <a:srgbClr val="5E4226"/>
+          <a:srgbClr val="5CD65C"/>
         </a:solidFill>
         <a:effectLst/>
       </p:bgPr>
@@ -4337,20 +3598,60 @@
       <p:grpSpPr/>
       <p:sp>
         <p:nvSpPr>
-          <p:cNvPr id="2" name="Rectangle 1"/>
+          <p:cNvPr id="2" name="텍스트"/>
+          <p:cNvSpPr txBox="1"/>
+          <p:nvPr/>
+        </p:nvSpPr>
+        <p:spPr>
+          <a:xfrm>
+            <a:off x="252000" y="324000"/>
+            <a:ext cx="2520000" cy="792000"/>
+          </a:xfrm>
+          <a:prstGeom prst="rect">
+            <a:avLst/>
+          </a:prstGeom>
+          <a:noFill/>
+        </p:spPr>
+        <p:txBody>
+          <a:bodyPr wrap="square" lIns="0" rIns="0" tIns="0" bIns="0" anchor="t">
+            <a:spAutoFit/>
+          </a:bodyPr>
+          <a:lstStyle/>
+          <a:p>
+            <a:pPr algn="l">
+              <a:lnSpc>
+                <a:spcPts val="1884"/>
+              </a:lnSpc>
+            </a:pPr>
+            <a:r>
+              <a:rPr sz="1300" b="1">
+                <a:solidFill>
+                  <a:srgbClr val="12151C"/>
+                </a:solidFill>
+                <a:latin typeface="맑은 고딕"/>
+                <a:ea typeface="맑은 고딕"/>
+              </a:rPr>
+              <a:t>공간에 이야기를 입힙니다</a:t>
+            </a:r>
+          </a:p>
+        </p:txBody>
+      </p:sp>
+      <p:sp>
+        <p:nvSpPr>
+          <p:cNvPr id="3" name="Rectangle 2"/>
           <p:cNvSpPr/>
           <p:nvPr/>
         </p:nvSpPr>
         <p:spPr>
           <a:xfrm>
-            <a:off x="0" y="0"/>
-            <a:ext cx="64800" cy="1800000"/>
+            <a:off x="0" y="1476000"/>
+            <a:ext cx="3240000" cy="324000"/>
           </a:xfrm>
           <a:prstGeom prst="rect">
             <a:avLst/>
           </a:prstGeom>
           <a:solidFill>
-            <a:srgbClr val="EFE0D2"/>
+            <a:srgbClr val="7DDE7D"/>
           </a:solidFill>
           <a:ln>
             <a:noFill/>
@@ -4366,14 +3667,14 @@
       </p:sp>
       <p:sp>
         <p:nvSpPr>
-          <p:cNvPr id="3" name="텍스트"/>
+          <p:cNvPr id="4" name="텍스트"/>
           <p:cNvSpPr txBox="1"/>
           <p:nvPr/>
         </p:nvSpPr>
         <p:spPr>
           <a:xfrm>
-            <a:off x="252000" y="432000"/>
-            <a:ext cx="2016000" cy="252000"/>
+            <a:off x="252000" y="1569600"/>
+            <a:ext cx="1872000" cy="142876"/>
           </a:xfrm>
           <a:prstGeom prst="rect">
             <a:avLst/>
@@ -4388,13 +3689,13 @@
           <a:p>
             <a:pPr algn="l">
               <a:lnSpc>
-                <a:spcPts val="2465"/>
+                <a:spcPts val="1087"/>
               </a:lnSpc>
             </a:pPr>
             <a:r>
-              <a:rPr sz="1700" b="1">
+              <a:rPr sz="750" b="1" spc="200">
                 <a:solidFill>
-                  <a:srgbClr val="FFFFFF"/>
+                  <a:srgbClr val="12151C"/>
                 </a:solidFill>
                 <a:latin typeface="맑은 고딕"/>
                 <a:ea typeface="맑은 고딕"/>
@@ -4406,130 +3707,20 @@
       </p:sp>
       <p:sp>
         <p:nvSpPr>
-          <p:cNvPr id="4" name="텍스트"/>
-          <p:cNvSpPr txBox="1"/>
-          <p:nvPr/>
-        </p:nvSpPr>
-        <p:spPr>
-          <a:xfrm>
-            <a:off x="252000" y="878400"/>
-            <a:ext cx="2016000" cy="540000"/>
-          </a:xfrm>
-          <a:prstGeom prst="rect">
-            <a:avLst/>
-          </a:prstGeom>
-          <a:noFill/>
-        </p:spPr>
-        <p:txBody>
-          <a:bodyPr wrap="square" lIns="0" rIns="0" tIns="0" bIns="0" anchor="t">
-            <a:spAutoFit/>
-          </a:bodyPr>
-          <a:lstStyle/>
-          <a:p>
-            <a:pPr algn="l">
-              <a:lnSpc>
-                <a:spcPts val="1232"/>
-              </a:lnSpc>
-            </a:pPr>
-            <a:r>
-              <a:rPr sz="850" b="0">
-                <a:solidFill>
-                  <a:srgbClr val="C7BDB3"/>
-                </a:solidFill>
-                <a:latin typeface="맑은 고딕"/>
-                <a:ea typeface="맑은 고딕"/>
-              </a:rPr>
-              <a:t>공간에 이야기를 입힙니다</a:t>
-            </a:r>
-          </a:p>
-        </p:txBody>
-      </p:sp>
-      <p:sp>
-        <p:nvSpPr>
-          <p:cNvPr id="5" name="Rectangle 4"/>
+          <p:cNvPr id="5" name="Oval 4"/>
           <p:cNvSpPr/>
           <p:nvPr/>
         </p:nvSpPr>
         <p:spPr>
           <a:xfrm>
-            <a:off x="2520000" y="1080000"/>
-            <a:ext cx="504000" cy="504000"/>
-          </a:xfrm>
-          <a:prstGeom prst="rect">
-            <a:avLst/>
-          </a:prstGeom>
-          <a:noFill/>
-          <a:ln w="9000">
-            <a:solidFill>
-              <a:srgbClr val="EFE0D2"/>
-            </a:solidFill>
-            <a:prstDash val="dash"/>
-          </a:ln>
-        </p:spPr>
-        <p:txBody>
-          <a:bodyPr rtlCol="0" anchor="ctr"/>
-          <a:lstStyle/>
-          <a:p>
-            <a:pPr algn="ctr"/>
-          </a:p>
-        </p:txBody>
-      </p:sp>
-      <p:sp>
-        <p:nvSpPr>
-          <p:cNvPr id="6" name="텍스트"/>
-          <p:cNvSpPr txBox="1"/>
-          <p:nvPr/>
-        </p:nvSpPr>
-        <p:spPr>
-          <a:xfrm>
-            <a:off x="2520000" y="1080000"/>
-            <a:ext cx="504000" cy="504000"/>
-          </a:xfrm>
-          <a:prstGeom prst="rect">
-            <a:avLst/>
-          </a:prstGeom>
-          <a:noFill/>
-        </p:spPr>
-        <p:txBody>
-          <a:bodyPr wrap="square" lIns="0" rIns="0" tIns="0" bIns="0" anchor="ctr">
-            <a:spAutoFit/>
-          </a:bodyPr>
-          <a:lstStyle/>
-          <a:p>
-            <a:pPr algn="ctr">
-              <a:lnSpc>
-                <a:spcPts val="1305"/>
-              </a:lnSpc>
-            </a:pPr>
-            <a:r>
-              <a:rPr sz="900" b="1">
-                <a:solidFill>
-                  <a:srgbClr val="C7BDB3"/>
-                </a:solidFill>
-                <a:latin typeface="맑은 고딕"/>
-                <a:ea typeface="맑은 고딕"/>
-              </a:rPr>
-              <a:t>QR</a:t>
-            </a:r>
-          </a:p>
-        </p:txBody>
-      </p:sp>
-      <p:sp>
-        <p:nvSpPr>
-          <p:cNvPr id="7" name="Rectangle 6"/>
-          <p:cNvSpPr/>
-          <p:nvPr/>
-        </p:nvSpPr>
-        <p:spPr>
-          <a:xfrm>
-            <a:off x="252000" y="763200"/>
-            <a:ext cx="201600" cy="14400"/>
-          </a:xfrm>
-          <a:prstGeom prst="rect">
+            <a:off x="2714400" y="1616400"/>
+            <a:ext cx="43200" cy="43200"/>
+          </a:xfrm>
+          <a:prstGeom prst="ellipse">
             <a:avLst/>
           </a:prstGeom>
           <a:solidFill>
-            <a:srgbClr val="EFE0D2"/>
+            <a:srgbClr val="12151C"/>
           </a:solidFill>
           <a:ln>
             <a:noFill/>
@@ -4545,20 +3736,22 @@
       </p:sp>
       <p:sp>
         <p:nvSpPr>
-          <p:cNvPr id="8" name="Oval 7"/>
+          <p:cNvPr id="6" name="Oval 5"/>
           <p:cNvSpPr/>
           <p:nvPr/>
         </p:nvSpPr>
         <p:spPr>
           <a:xfrm>
-            <a:off x="2729880" y="282960"/>
-            <a:ext cx="84240" cy="142560"/>
+            <a:off x="2822400" y="1616400"/>
+            <a:ext cx="43200" cy="43200"/>
           </a:xfrm>
           <a:prstGeom prst="ellipse">
             <a:avLst/>
           </a:prstGeom>
           <a:solidFill>
-            <a:srgbClr val="EFE0D2"/>
+            <a:srgbClr val="12151C">
+              <a:alpha val="50000"/>
+            </a:srgbClr>
           </a:solidFill>
           <a:ln>
             <a:noFill/>
@@ -4574,136 +3767,22 @@
       </p:sp>
       <p:sp>
         <p:nvSpPr>
-          <p:cNvPr id="9" name="Oval 8"/>
+          <p:cNvPr id="7" name="Oval 6"/>
           <p:cNvSpPr/>
           <p:nvPr/>
         </p:nvSpPr>
         <p:spPr>
-          <a:xfrm rot="4320000">
-            <a:off x="2803834" y="336691"/>
-            <a:ext cx="84240" cy="142560"/>
+          <a:xfrm>
+            <a:off x="2930400" y="1616400"/>
+            <a:ext cx="43200" cy="43200"/>
           </a:xfrm>
           <a:prstGeom prst="ellipse">
             <a:avLst/>
           </a:prstGeom>
           <a:solidFill>
-            <a:srgbClr val="EFE0D2"/>
-          </a:solidFill>
-          <a:ln>
-            <a:noFill/>
-          </a:ln>
-        </p:spPr>
-        <p:txBody>
-          <a:bodyPr rtlCol="0" anchor="ctr"/>
-          <a:lstStyle/>
-          <a:p>
-            <a:pPr algn="ctr"/>
-          </a:p>
-        </p:txBody>
-      </p:sp>
-      <p:sp>
-        <p:nvSpPr>
-          <p:cNvPr id="10" name="Oval 9"/>
-          <p:cNvSpPr/>
-          <p:nvPr/>
-        </p:nvSpPr>
-        <p:spPr>
-          <a:xfrm rot="8640000">
-            <a:off x="2775586" y="423629"/>
-            <a:ext cx="84240" cy="142560"/>
-          </a:xfrm>
-          <a:prstGeom prst="ellipse">
-            <a:avLst/>
-          </a:prstGeom>
-          <a:solidFill>
-            <a:srgbClr val="EFE0D2"/>
-          </a:solidFill>
-          <a:ln>
-            <a:noFill/>
-          </a:ln>
-        </p:spPr>
-        <p:txBody>
-          <a:bodyPr rtlCol="0" anchor="ctr"/>
-          <a:lstStyle/>
-          <a:p>
-            <a:pPr algn="ctr"/>
-          </a:p>
-        </p:txBody>
-      </p:sp>
-      <p:sp>
-        <p:nvSpPr>
-          <p:cNvPr id="11" name="Oval 10"/>
-          <p:cNvSpPr/>
-          <p:nvPr/>
-        </p:nvSpPr>
-        <p:spPr>
-          <a:xfrm rot="12960000">
-            <a:off x="2684174" y="423629"/>
-            <a:ext cx="84240" cy="142560"/>
-          </a:xfrm>
-          <a:prstGeom prst="ellipse">
-            <a:avLst/>
-          </a:prstGeom>
-          <a:solidFill>
-            <a:srgbClr val="EFE0D2"/>
-          </a:solidFill>
-          <a:ln>
-            <a:noFill/>
-          </a:ln>
-        </p:spPr>
-        <p:txBody>
-          <a:bodyPr rtlCol="0" anchor="ctr"/>
-          <a:lstStyle/>
-          <a:p>
-            <a:pPr algn="ctr"/>
-          </a:p>
-        </p:txBody>
-      </p:sp>
-      <p:sp>
-        <p:nvSpPr>
-          <p:cNvPr id="12" name="Oval 11"/>
-          <p:cNvSpPr/>
-          <p:nvPr/>
-        </p:nvSpPr>
-        <p:spPr>
-          <a:xfrm rot="17280000">
-            <a:off x="2655926" y="336691"/>
-            <a:ext cx="84240" cy="142560"/>
-          </a:xfrm>
-          <a:prstGeom prst="ellipse">
-            <a:avLst/>
-          </a:prstGeom>
-          <a:solidFill>
-            <a:srgbClr val="EFE0D2"/>
-          </a:solidFill>
-          <a:ln>
-            <a:noFill/>
-          </a:ln>
-        </p:spPr>
-        <p:txBody>
-          <a:bodyPr rtlCol="0" anchor="ctr"/>
-          <a:lstStyle/>
-          <a:p>
-            <a:pPr algn="ctr"/>
-          </a:p>
-        </p:txBody>
-      </p:sp>
-      <p:sp>
-        <p:nvSpPr>
-          <p:cNvPr id="13" name="Oval 12"/>
-          <p:cNvSpPr/>
-          <p:nvPr/>
-        </p:nvSpPr>
-        <p:spPr>
-          <a:xfrm>
-            <a:off x="2736360" y="396360"/>
-            <a:ext cx="71280" cy="71280"/>
-          </a:xfrm>
-          <a:prstGeom prst="ellipse">
-            <a:avLst/>
-          </a:prstGeom>
-          <a:solidFill>
-            <a:srgbClr val="786049"/>
+            <a:srgbClr val="12151C">
+              <a:alpha val="50000"/>
+            </a:srgbClr>
           </a:solidFill>
           <a:ln>
             <a:noFill/>

--- a/public/fun/cards/life/life-20.pptx
+++ b/public/fun/cards/life/life-20.pptx
@@ -3105,8 +3105,8 @@
         </p:nvSpPr>
         <p:spPr>
           <a:xfrm>
-            <a:off x="252000" y="144000"/>
-            <a:ext cx="201600" cy="21600"/>
+            <a:off x="0" y="0"/>
+            <a:ext cx="3240000" cy="36000"/>
           </a:xfrm>
           <a:prstGeom prst="rect">
             <a:avLst/>
@@ -3134,8 +3134,8 @@
         </p:nvSpPr>
         <p:spPr>
           <a:xfrm>
-            <a:off x="252000" y="273600"/>
-            <a:ext cx="2160000" cy="360000"/>
+            <a:off x="252000" y="223200"/>
+            <a:ext cx="1296000" cy="237600"/>
           </a:xfrm>
           <a:prstGeom prst="rect">
             <a:avLst/>
@@ -3150,11 +3150,11 @@
           <a:p>
             <a:pPr algn="l">
               <a:lnSpc>
-                <a:spcPts val="3190"/>
+                <a:spcPts val="1957"/>
               </a:lnSpc>
             </a:pPr>
             <a:r>
-              <a:rPr sz="2200" b="1">
+              <a:rPr sz="1350" b="1" spc="120">
                 <a:solidFill>
                   <a:srgbClr val="12151C"/>
                 </a:solidFill>
@@ -3174,8 +3174,8 @@
         </p:nvSpPr>
         <p:spPr>
           <a:xfrm>
-            <a:off x="252000" y="676800"/>
-            <a:ext cx="2160000" cy="171451"/>
+            <a:off x="252000" y="475200"/>
+            <a:ext cx="1296000" cy="133351"/>
           </a:xfrm>
           <a:prstGeom prst="rect">
             <a:avLst/>
@@ -3190,11 +3190,11 @@
           <a:p>
             <a:pPr algn="l">
               <a:lnSpc>
-                <a:spcPts val="1305"/>
+                <a:spcPts val="1015"/>
               </a:lnSpc>
             </a:pPr>
             <a:r>
-              <a:rPr sz="900" b="0">
+              <a:rPr sz="700" b="0">
                 <a:solidFill>
                   <a:srgbClr val="2E5E34"/>
                 </a:solidFill>
@@ -3214,7 +3214,7 @@
         </p:nvSpPr>
         <p:spPr>
           <a:xfrm>
-            <a:off x="1548000" y="230400"/>
+            <a:off x="1548000" y="259200"/>
             <a:ext cx="1440000" cy="123826"/>
           </a:xfrm>
           <a:prstGeom prst="rect">
@@ -3234,7 +3234,7 @@
               </a:lnSpc>
             </a:pPr>
             <a:r>
-              <a:rPr sz="650" b="1" spc="200">
+              <a:rPr sz="650" b="1" spc="220">
                 <a:solidFill>
                   <a:srgbClr val="2E5E34"/>
                 </a:solidFill>
@@ -3254,13 +3254,13 @@
         </p:nvCxnSpPr>
         <p:spPr>
           <a:xfrm>
-            <a:off x="252000" y="1051200"/>
+            <a:off x="252000" y="907200"/>
             <a:ext cx="2736000" cy="0"/>
           </a:xfrm>
           <a:prstGeom prst="line">
             <a:avLst/>
           </a:prstGeom>
-          <a:ln w="5760">
+          <a:ln w="3600">
             <a:solidFill>
               <a:srgbClr val="D1F4D1"/>
             </a:solidFill>
@@ -3275,8 +3275,8 @@
         </p:nvSpPr>
         <p:spPr>
           <a:xfrm>
-            <a:off x="252000" y="1123200"/>
-            <a:ext cx="576000" cy="99061"/>
+            <a:off x="252000" y="986400"/>
+            <a:ext cx="576000" cy="91441"/>
           </a:xfrm>
           <a:prstGeom prst="rect">
             <a:avLst/>
@@ -3291,11 +3291,11 @@
           <a:p>
             <a:pPr algn="l">
               <a:lnSpc>
-                <a:spcPts val="754"/>
+                <a:spcPts val="696"/>
               </a:lnSpc>
             </a:pPr>
             <a:r>
-              <a:rPr sz="520" b="1" spc="150">
+              <a:rPr sz="480" b="1" spc="160">
                 <a:solidFill>
                   <a:srgbClr val="2E5E34"/>
                 </a:solidFill>
@@ -3315,8 +3315,8 @@
         </p:nvSpPr>
         <p:spPr>
           <a:xfrm>
-            <a:off x="900000" y="1101600"/>
-            <a:ext cx="2088000" cy="142876"/>
+            <a:off x="936000" y="968400"/>
+            <a:ext cx="2052000" cy="133351"/>
           </a:xfrm>
           <a:prstGeom prst="rect">
             <a:avLst/>
@@ -3331,11 +3331,11 @@
           <a:p>
             <a:pPr algn="l">
               <a:lnSpc>
-                <a:spcPts val="1087"/>
+                <a:spcPts val="1015"/>
               </a:lnSpc>
             </a:pPr>
             <a:r>
-              <a:rPr sz="750" b="0">
+              <a:rPr sz="700" b="0">
                 <a:solidFill>
                   <a:srgbClr val="12151C"/>
                 </a:solidFill>
@@ -3355,13 +3355,13 @@
         </p:nvCxnSpPr>
         <p:spPr>
           <a:xfrm>
-            <a:off x="252000" y="1274400"/>
+            <a:off x="252000" y="1137600"/>
             <a:ext cx="2736000" cy="0"/>
           </a:xfrm>
           <a:prstGeom prst="line">
             <a:avLst/>
           </a:prstGeom>
-          <a:ln w="5760">
+          <a:ln w="3600">
             <a:solidFill>
               <a:srgbClr val="D1F4D1"/>
             </a:solidFill>
@@ -3376,8 +3376,8 @@
         </p:nvSpPr>
         <p:spPr>
           <a:xfrm>
-            <a:off x="252000" y="1346400"/>
-            <a:ext cx="576000" cy="99061"/>
+            <a:off x="252000" y="1216800"/>
+            <a:ext cx="576000" cy="91441"/>
           </a:xfrm>
           <a:prstGeom prst="rect">
             <a:avLst/>
@@ -3392,11 +3392,11 @@
           <a:p>
             <a:pPr algn="l">
               <a:lnSpc>
-                <a:spcPts val="754"/>
+                <a:spcPts val="696"/>
               </a:lnSpc>
             </a:pPr>
             <a:r>
-              <a:rPr sz="520" b="1" spc="150">
+              <a:rPr sz="480" b="1" spc="160">
                 <a:solidFill>
                   <a:srgbClr val="2E5E34"/>
                 </a:solidFill>
@@ -3416,8 +3416,8 @@
         </p:nvSpPr>
         <p:spPr>
           <a:xfrm>
-            <a:off x="900000" y="1324800"/>
-            <a:ext cx="2088000" cy="142876"/>
+            <a:off x="936000" y="1198800"/>
+            <a:ext cx="2052000" cy="133351"/>
           </a:xfrm>
           <a:prstGeom prst="rect">
             <a:avLst/>
@@ -3432,11 +3432,11 @@
           <a:p>
             <a:pPr algn="l">
               <a:lnSpc>
-                <a:spcPts val="1087"/>
+                <a:spcPts val="1015"/>
               </a:lnSpc>
             </a:pPr>
             <a:r>
-              <a:rPr sz="750" b="0">
+              <a:rPr sz="700" b="0">
                 <a:solidFill>
                   <a:srgbClr val="12151C"/>
                 </a:solidFill>
@@ -3456,13 +3456,13 @@
         </p:nvCxnSpPr>
         <p:spPr>
           <a:xfrm>
-            <a:off x="252000" y="1497600"/>
+            <a:off x="252000" y="1368000"/>
             <a:ext cx="2736000" cy="0"/>
           </a:xfrm>
           <a:prstGeom prst="line">
             <a:avLst/>
           </a:prstGeom>
-          <a:ln w="5760">
+          <a:ln w="3600">
             <a:solidFill>
               <a:srgbClr val="D1F4D1"/>
             </a:solidFill>
@@ -3477,8 +3477,8 @@
         </p:nvSpPr>
         <p:spPr>
           <a:xfrm>
-            <a:off x="252000" y="1569600"/>
-            <a:ext cx="576000" cy="99061"/>
+            <a:off x="252000" y="1447200"/>
+            <a:ext cx="576000" cy="91441"/>
           </a:xfrm>
           <a:prstGeom prst="rect">
             <a:avLst/>
@@ -3493,11 +3493,11 @@
           <a:p>
             <a:pPr algn="l">
               <a:lnSpc>
-                <a:spcPts val="754"/>
+                <a:spcPts val="696"/>
               </a:lnSpc>
             </a:pPr>
             <a:r>
-              <a:rPr sz="520" b="1" spc="150">
+              <a:rPr sz="480" b="1" spc="160">
                 <a:solidFill>
                   <a:srgbClr val="2E5E34"/>
                 </a:solidFill>
@@ -3517,8 +3517,8 @@
         </p:nvSpPr>
         <p:spPr>
           <a:xfrm>
-            <a:off x="900000" y="1548000"/>
-            <a:ext cx="2088000" cy="142876"/>
+            <a:off x="936000" y="1429200"/>
+            <a:ext cx="2052000" cy="133351"/>
           </a:xfrm>
           <a:prstGeom prst="rect">
             <a:avLst/>
@@ -3533,11 +3533,11 @@
           <a:p>
             <a:pPr algn="l">
               <a:lnSpc>
-                <a:spcPts val="1087"/>
+                <a:spcPts val="1015"/>
               </a:lnSpc>
             </a:pPr>
             <a:r>
-              <a:rPr sz="750" b="0">
+              <a:rPr sz="700" b="0">
                 <a:solidFill>
                   <a:srgbClr val="12151C"/>
                 </a:solidFill>
@@ -3557,13 +3557,13 @@
         </p:nvCxnSpPr>
         <p:spPr>
           <a:xfrm>
-            <a:off x="252000" y="1720800"/>
+            <a:off x="252000" y="1598400"/>
             <a:ext cx="2736000" cy="0"/>
           </a:xfrm>
           <a:prstGeom prst="line">
             <a:avLst/>
           </a:prstGeom>
-          <a:ln w="5760">
+          <a:ln w="3600">
             <a:solidFill>
               <a:srgbClr val="D1F4D1"/>
             </a:solidFill>
@@ -3604,8 +3604,8 @@
         </p:nvSpPr>
         <p:spPr>
           <a:xfrm>
-            <a:off x="252000" y="324000"/>
-            <a:ext cx="2520000" cy="792000"/>
+            <a:off x="252000" y="252000"/>
+            <a:ext cx="1080000" cy="99061"/>
           </a:xfrm>
           <a:prstGeom prst="rect">
             <a:avLst/>
@@ -3620,18 +3620,18 @@
           <a:p>
             <a:pPr algn="l">
               <a:lnSpc>
-                <a:spcPts val="1884"/>
+                <a:spcPts val="754"/>
               </a:lnSpc>
             </a:pPr>
             <a:r>
-              <a:rPr sz="1300" b="1">
+              <a:rPr sz="520" b="1" spc="240">
                 <a:solidFill>
-                  <a:srgbClr val="12151C"/>
+                  <a:srgbClr val="223F2A"/>
                 </a:solidFill>
                 <a:latin typeface="맑은 고딕"/>
                 <a:ea typeface="맑은 고딕"/>
               </a:rPr>
-              <a:t>공간에 이야기를 입힙니다</a:t>
+              <a:t>취급 품목</a:t>
             </a:r>
           </a:p>
         </p:txBody>
@@ -3644,79 +3644,10 @@
         </p:nvSpPr>
         <p:spPr>
           <a:xfrm>
-            <a:off x="0" y="1476000"/>
-            <a:ext cx="3240000" cy="324000"/>
+            <a:off x="252000" y="352800"/>
+            <a:ext cx="108000" cy="14400"/>
           </a:xfrm>
           <a:prstGeom prst="rect">
-            <a:avLst/>
-          </a:prstGeom>
-          <a:solidFill>
-            <a:srgbClr val="7DDE7D"/>
-          </a:solidFill>
-          <a:ln>
-            <a:noFill/>
-          </a:ln>
-        </p:spPr>
-        <p:txBody>
-          <a:bodyPr rtlCol="0" anchor="ctr"/>
-          <a:lstStyle/>
-          <a:p>
-            <a:pPr algn="ctr"/>
-          </a:p>
-        </p:txBody>
-      </p:sp>
-      <p:sp>
-        <p:nvSpPr>
-          <p:cNvPr id="4" name="텍스트"/>
-          <p:cNvSpPr txBox="1"/>
-          <p:nvPr/>
-        </p:nvSpPr>
-        <p:spPr>
-          <a:xfrm>
-            <a:off x="252000" y="1569600"/>
-            <a:ext cx="1872000" cy="142876"/>
-          </a:xfrm>
-          <a:prstGeom prst="rect">
-            <a:avLst/>
-          </a:prstGeom>
-          <a:noFill/>
-        </p:spPr>
-        <p:txBody>
-          <a:bodyPr wrap="square" lIns="0" rIns="0" tIns="0" bIns="0" anchor="t">
-            <a:spAutoFit/>
-          </a:bodyPr>
-          <a:lstStyle/>
-          <a:p>
-            <a:pPr algn="l">
-              <a:lnSpc>
-                <a:spcPts val="1087"/>
-              </a:lnSpc>
-            </a:pPr>
-            <a:r>
-              <a:rPr sz="750" b="1" spc="200">
-                <a:solidFill>
-                  <a:srgbClr val="12151C"/>
-                </a:solidFill>
-                <a:latin typeface="맑은 고딕"/>
-                <a:ea typeface="맑은 고딕"/>
-              </a:rPr>
-              <a:t>상호명</a:t>
-            </a:r>
-          </a:p>
-        </p:txBody>
-      </p:sp>
-      <p:sp>
-        <p:nvSpPr>
-          <p:cNvPr id="5" name="Oval 4"/>
-          <p:cNvSpPr/>
-          <p:nvPr/>
-        </p:nvSpPr>
-        <p:spPr>
-          <a:xfrm>
-            <a:off x="2714400" y="1616400"/>
-            <a:ext cx="43200" cy="43200"/>
-          </a:xfrm>
-          <a:prstGeom prst="ellipse">
             <a:avLst/>
           </a:prstGeom>
           <a:solidFill>
@@ -3734,27 +3665,291 @@
           </a:p>
         </p:txBody>
       </p:sp>
-      <p:sp>
-        <p:nvSpPr>
-          <p:cNvPr id="6" name="Oval 5"/>
+      <p:cxnSp>
+        <p:nvCxnSpPr>
+          <p:cNvPr id="4" name="Connector 3"/>
+          <p:cNvCxnSpPr/>
+          <p:nvPr/>
+        </p:nvCxnSpPr>
+        <p:spPr>
+          <a:xfrm>
+            <a:off x="252000" y="468000"/>
+            <a:ext cx="1512000" cy="0"/>
+          </a:xfrm>
+          <a:prstGeom prst="line">
+            <a:avLst/>
+          </a:prstGeom>
+          <a:ln w="3600">
+            <a:solidFill>
+              <a:srgbClr val="3E8942"/>
+            </a:solidFill>
+          </a:ln>
+        </p:spPr>
+      </p:cxnSp>
+      <p:sp>
+        <p:nvSpPr>
+          <p:cNvPr id="5" name="텍스트"/>
+          <p:cNvSpPr txBox="1"/>
+          <p:nvPr/>
+        </p:nvSpPr>
+        <p:spPr>
+          <a:xfrm>
+            <a:off x="252000" y="511200"/>
+            <a:ext cx="1260000" cy="133351"/>
+          </a:xfrm>
+          <a:prstGeom prst="rect">
+            <a:avLst/>
+          </a:prstGeom>
+          <a:noFill/>
+        </p:spPr>
+        <p:txBody>
+          <a:bodyPr wrap="square" lIns="0" rIns="0" tIns="0" bIns="0" anchor="t">
+            <a:spAutoFit/>
+          </a:bodyPr>
+          <a:lstStyle/>
+          <a:p>
+            <a:pPr algn="l">
+              <a:lnSpc>
+                <a:spcPts val="1015"/>
+              </a:lnSpc>
+            </a:pPr>
+            <a:r>
+              <a:rPr sz="700" b="0">
+                <a:solidFill>
+                  <a:srgbClr val="12151C"/>
+                </a:solidFill>
+                <a:latin typeface="맑은 고딕"/>
+                <a:ea typeface="맑은 고딕"/>
+              </a:rPr>
+              <a:t>인테리어</a:t>
+            </a:r>
+          </a:p>
+        </p:txBody>
+      </p:sp>
+      <p:cxnSp>
+        <p:nvCxnSpPr>
+          <p:cNvPr id="6" name="Connector 5"/>
+          <p:cNvCxnSpPr/>
+          <p:nvPr/>
+        </p:nvCxnSpPr>
+        <p:spPr>
+          <a:xfrm>
+            <a:off x="252000" y="655200"/>
+            <a:ext cx="1512000" cy="0"/>
+          </a:xfrm>
+          <a:prstGeom prst="line">
+            <a:avLst/>
+          </a:prstGeom>
+          <a:ln w="3600">
+            <a:solidFill>
+              <a:srgbClr val="3E8942"/>
+            </a:solidFill>
+          </a:ln>
+        </p:spPr>
+      </p:cxnSp>
+      <p:sp>
+        <p:nvSpPr>
+          <p:cNvPr id="7" name="텍스트"/>
+          <p:cNvSpPr txBox="1"/>
+          <p:nvPr/>
+        </p:nvSpPr>
+        <p:spPr>
+          <a:xfrm>
+            <a:off x="252000" y="698400"/>
+            <a:ext cx="1260000" cy="133351"/>
+          </a:xfrm>
+          <a:prstGeom prst="rect">
+            <a:avLst/>
+          </a:prstGeom>
+          <a:noFill/>
+        </p:spPr>
+        <p:txBody>
+          <a:bodyPr wrap="square" lIns="0" rIns="0" tIns="0" bIns="0" anchor="t">
+            <a:spAutoFit/>
+          </a:bodyPr>
+          <a:lstStyle/>
+          <a:p>
+            <a:pPr algn="l">
+              <a:lnSpc>
+                <a:spcPts val="1015"/>
+              </a:lnSpc>
+            </a:pPr>
+            <a:r>
+              <a:rPr sz="700" b="0">
+                <a:solidFill>
+                  <a:srgbClr val="12151C"/>
+                </a:solidFill>
+                <a:latin typeface="맑은 고딕"/>
+                <a:ea typeface="맑은 고딕"/>
+              </a:rPr>
+              <a:t>도배 · 장판</a:t>
+            </a:r>
+          </a:p>
+        </p:txBody>
+      </p:sp>
+      <p:cxnSp>
+        <p:nvCxnSpPr>
+          <p:cNvPr id="8" name="Connector 7"/>
+          <p:cNvCxnSpPr/>
+          <p:nvPr/>
+        </p:nvCxnSpPr>
+        <p:spPr>
+          <a:xfrm>
+            <a:off x="252000" y="842400"/>
+            <a:ext cx="1512000" cy="0"/>
+          </a:xfrm>
+          <a:prstGeom prst="line">
+            <a:avLst/>
+          </a:prstGeom>
+          <a:ln w="3600">
+            <a:solidFill>
+              <a:srgbClr val="3E8942"/>
+            </a:solidFill>
+          </a:ln>
+        </p:spPr>
+      </p:cxnSp>
+      <p:sp>
+        <p:nvSpPr>
+          <p:cNvPr id="9" name="텍스트"/>
+          <p:cNvSpPr txBox="1"/>
+          <p:nvPr/>
+        </p:nvSpPr>
+        <p:spPr>
+          <a:xfrm>
+            <a:off x="252000" y="885600"/>
+            <a:ext cx="1260000" cy="133351"/>
+          </a:xfrm>
+          <a:prstGeom prst="rect">
+            <a:avLst/>
+          </a:prstGeom>
+          <a:noFill/>
+        </p:spPr>
+        <p:txBody>
+          <a:bodyPr wrap="square" lIns="0" rIns="0" tIns="0" bIns="0" anchor="t">
+            <a:spAutoFit/>
+          </a:bodyPr>
+          <a:lstStyle/>
+          <a:p>
+            <a:pPr algn="l">
+              <a:lnSpc>
+                <a:spcPts val="1015"/>
+              </a:lnSpc>
+            </a:pPr>
+            <a:r>
+              <a:rPr sz="700" b="0">
+                <a:solidFill>
+                  <a:srgbClr val="12151C"/>
+                </a:solidFill>
+                <a:latin typeface="맑은 고딕"/>
+                <a:ea typeface="맑은 고딕"/>
+              </a:rPr>
+              <a:t>소품 · 문구</a:t>
+            </a:r>
+          </a:p>
+        </p:txBody>
+      </p:sp>
+      <p:cxnSp>
+        <p:nvCxnSpPr>
+          <p:cNvPr id="10" name="Connector 9"/>
+          <p:cNvCxnSpPr/>
+          <p:nvPr/>
+        </p:nvCxnSpPr>
+        <p:spPr>
+          <a:xfrm>
+            <a:off x="252000" y="1029600"/>
+            <a:ext cx="1512000" cy="0"/>
+          </a:xfrm>
+          <a:prstGeom prst="line">
+            <a:avLst/>
+          </a:prstGeom>
+          <a:ln w="3600">
+            <a:solidFill>
+              <a:srgbClr val="3E8942"/>
+            </a:solidFill>
+          </a:ln>
+        </p:spPr>
+      </p:cxnSp>
+      <p:sp>
+        <p:nvSpPr>
+          <p:cNvPr id="11" name="텍스트"/>
+          <p:cNvSpPr txBox="1"/>
+          <p:nvPr/>
+        </p:nvSpPr>
+        <p:spPr>
+          <a:xfrm>
+            <a:off x="252000" y="1072800"/>
+            <a:ext cx="1260000" cy="133351"/>
+          </a:xfrm>
+          <a:prstGeom prst="rect">
+            <a:avLst/>
+          </a:prstGeom>
+          <a:noFill/>
+        </p:spPr>
+        <p:txBody>
+          <a:bodyPr wrap="square" lIns="0" rIns="0" tIns="0" bIns="0" anchor="t">
+            <a:spAutoFit/>
+          </a:bodyPr>
+          <a:lstStyle/>
+          <a:p>
+            <a:pPr algn="l">
+              <a:lnSpc>
+                <a:spcPts val="1015"/>
+              </a:lnSpc>
+            </a:pPr>
+            <a:r>
+              <a:rPr sz="700" b="0">
+                <a:solidFill>
+                  <a:srgbClr val="12151C"/>
+                </a:solidFill>
+                <a:latin typeface="맑은 고딕"/>
+                <a:ea typeface="맑은 고딕"/>
+              </a:rPr>
+              <a:t>이사 정리</a:t>
+            </a:r>
+          </a:p>
+        </p:txBody>
+      </p:sp>
+      <p:cxnSp>
+        <p:nvCxnSpPr>
+          <p:cNvPr id="12" name="Connector 11"/>
+          <p:cNvCxnSpPr/>
+          <p:nvPr/>
+        </p:nvCxnSpPr>
+        <p:spPr>
+          <a:xfrm>
+            <a:off x="252000" y="1216800"/>
+            <a:ext cx="1512000" cy="0"/>
+          </a:xfrm>
+          <a:prstGeom prst="line">
+            <a:avLst/>
+          </a:prstGeom>
+          <a:ln w="3600">
+            <a:solidFill>
+              <a:srgbClr val="3E8942"/>
+            </a:solidFill>
+          </a:ln>
+        </p:spPr>
+      </p:cxnSp>
+      <p:sp>
+        <p:nvSpPr>
+          <p:cNvPr id="13" name="Rectangle 12"/>
           <p:cNvSpPr/>
           <p:nvPr/>
         </p:nvSpPr>
         <p:spPr>
           <a:xfrm>
-            <a:off x="2822400" y="1616400"/>
-            <a:ext cx="43200" cy="43200"/>
-          </a:xfrm>
-          <a:prstGeom prst="ellipse">
+            <a:off x="2196000" y="396000"/>
+            <a:ext cx="720000" cy="720000"/>
+          </a:xfrm>
+          <a:prstGeom prst="rect">
             <a:avLst/>
           </a:prstGeom>
-          <a:solidFill>
-            <a:srgbClr val="12151C">
-              <a:alpha val="50000"/>
-            </a:srgbClr>
-          </a:solidFill>
-          <a:ln>
-            <a:noFill/>
+          <a:noFill/>
+          <a:ln w="4320">
+            <a:solidFill>
+              <a:srgbClr val="223F2A"/>
+            </a:solidFill>
+            <a:prstDash val="dash"/>
           </a:ln>
         </p:spPr>
         <p:txBody>
@@ -3767,32 +3962,121 @@
       </p:sp>
       <p:sp>
         <p:nvSpPr>
-          <p:cNvPr id="7" name="Oval 6"/>
-          <p:cNvSpPr/>
+          <p:cNvPr id="14" name="텍스트"/>
+          <p:cNvSpPr txBox="1"/>
           <p:nvPr/>
         </p:nvSpPr>
         <p:spPr>
           <a:xfrm>
-            <a:off x="2930400" y="1616400"/>
-            <a:ext cx="43200" cy="43200"/>
-          </a:xfrm>
-          <a:prstGeom prst="ellipse">
+            <a:off x="2196000" y="396000"/>
+            <a:ext cx="720000" cy="720000"/>
+          </a:xfrm>
+          <a:prstGeom prst="rect">
             <a:avLst/>
           </a:prstGeom>
-          <a:solidFill>
-            <a:srgbClr val="12151C">
-              <a:alpha val="50000"/>
-            </a:srgbClr>
-          </a:solidFill>
-          <a:ln>
-            <a:noFill/>
-          </a:ln>
-        </p:spPr>
-        <p:txBody>
-          <a:bodyPr rtlCol="0" anchor="ctr"/>
-          <a:lstStyle/>
-          <a:p>
-            <a:pPr algn="ctr"/>
+          <a:noFill/>
+        </p:spPr>
+        <p:txBody>
+          <a:bodyPr wrap="square" lIns="0" rIns="0" tIns="0" bIns="0" anchor="ctr">
+            <a:spAutoFit/>
+          </a:bodyPr>
+          <a:lstStyle/>
+          <a:p>
+            <a:pPr algn="ctr">
+              <a:lnSpc>
+                <a:spcPts val="1305"/>
+              </a:lnSpc>
+            </a:pPr>
+            <a:r>
+              <a:rPr sz="900" b="1">
+                <a:solidFill>
+                  <a:srgbClr val="223F2A"/>
+                </a:solidFill>
+                <a:latin typeface="맑은 고딕"/>
+                <a:ea typeface="맑은 고딕"/>
+              </a:rPr>
+              <a:t>QR</a:t>
+            </a:r>
+          </a:p>
+        </p:txBody>
+      </p:sp>
+      <p:sp>
+        <p:nvSpPr>
+          <p:cNvPr id="15" name="텍스트"/>
+          <p:cNvSpPr txBox="1"/>
+          <p:nvPr/>
+        </p:nvSpPr>
+        <p:spPr>
+          <a:xfrm>
+            <a:off x="2196000" y="1209600"/>
+            <a:ext cx="720000" cy="118111"/>
+          </a:xfrm>
+          <a:prstGeom prst="rect">
+            <a:avLst/>
+          </a:prstGeom>
+          <a:noFill/>
+        </p:spPr>
+        <p:txBody>
+          <a:bodyPr wrap="square" lIns="0" rIns="0" tIns="0" bIns="0" anchor="t">
+            <a:spAutoFit/>
+          </a:bodyPr>
+          <a:lstStyle/>
+          <a:p>
+            <a:pPr algn="ctr">
+              <a:lnSpc>
+                <a:spcPts val="899"/>
+              </a:lnSpc>
+            </a:pPr>
+            <a:r>
+              <a:rPr sz="620" b="0">
+                <a:solidFill>
+                  <a:srgbClr val="12151C"/>
+                </a:solidFill>
+                <a:latin typeface="맑은 고딕"/>
+                <a:ea typeface="맑은 고딕"/>
+              </a:rPr>
+              <a:t>blog.example.com</a:t>
+            </a:r>
+          </a:p>
+        </p:txBody>
+      </p:sp>
+      <p:sp>
+        <p:nvSpPr>
+          <p:cNvPr id="16" name="텍스트"/>
+          <p:cNvSpPr txBox="1"/>
+          <p:nvPr/>
+        </p:nvSpPr>
+        <p:spPr>
+          <a:xfrm>
+            <a:off x="2196000" y="1353600"/>
+            <a:ext cx="720000" cy="118111"/>
+          </a:xfrm>
+          <a:prstGeom prst="rect">
+            <a:avLst/>
+          </a:prstGeom>
+          <a:noFill/>
+        </p:spPr>
+        <p:txBody>
+          <a:bodyPr wrap="square" lIns="0" rIns="0" tIns="0" bIns="0" anchor="t">
+            <a:spAutoFit/>
+          </a:bodyPr>
+          <a:lstStyle/>
+          <a:p>
+            <a:pPr algn="ctr">
+              <a:lnSpc>
+                <a:spcPts val="899"/>
+              </a:lnSpc>
+            </a:pPr>
+            <a:r>
+              <a:rPr sz="620" b="0">
+                <a:solidFill>
+                  <a:srgbClr val="223F2A"/>
+                </a:solidFill>
+                <a:latin typeface="맑은 고딕"/>
+                <a:ea typeface="맑은 고딕"/>
+              </a:rPr>
+              <a:t>평일 09:00 – 19:00</a:t>
+            </a:r>
           </a:p>
         </p:txBody>
       </p:sp>
